--- a/slides/Chapter 11 - Interest Groups and Lobbying (Lecture Deck).pptx
+++ b/slides/Chapter 11 - Interest Groups and Lobbying (Lecture Deck).pptx
@@ -3133,92 +3133,6 @@
           </a:p>
         </p:txBody>
       </p:sp>
-      <p:sp>
-        <p:nvSpPr>
-          <p:cNvPr id="16" name="Shape 13"/>
-          <p:cNvSpPr/>
-          <p:nvPr/>
-        </p:nvSpPr>
-        <p:spPr>
-          <a:xfrm>
-            <a:off x="594360" y="5943600"/>
-            <a:ext cx="11002975" cy="502920"/>
-          </a:xfrm>
-          <a:prstGeom prst="roundRect">
-            <a:avLst>
-              <a:gd name="adj" fmla="val 12727"/>
-            </a:avLst>
-          </a:prstGeom>
-          <a:solidFill>
-            <a:srgbClr val="FFFFFF"/>
-          </a:solidFill>
-          <a:ln w="19050">
-            <a:solidFill>
-              <a:srgbClr val="B07D2B"/>
-            </a:solidFill>
-            <a:prstDash val="solid"/>
-          </a:ln>
-        </p:spPr>
-      </p:sp>
-      <p:sp>
-        <p:nvSpPr>
-          <p:cNvPr id="17" name="Text 14"/>
-          <p:cNvSpPr txBox="1"/>
-          <p:nvPr/>
-        </p:nvSpPr>
-        <p:spPr>
-          <a:xfrm>
-            <a:off x="868680" y="6108192"/>
-            <a:ext cx="10454335" cy="329184"/>
-          </a:xfrm>
-          <a:prstGeom prst="rect">
-            <a:avLst/>
-          </a:prstGeom>
-          <a:noFill/>
-          <a:ln/>
-        </p:spPr>
-        <p:txBody>
-          <a:bodyPr wrap="square" lIns="0" tIns="0" rIns="0" bIns="0" rtlCol="0" anchor="ctr"/>
-          <a:lstStyle/>
-          <a:p>
-            <a:pPr indent="0" marL="0">
-              <a:buNone/>
-            </a:pPr>
-            <a:endParaRPr lang="en-US" sz="1400" dirty="0"/>
-          </a:p>
-        </p:txBody>
-      </p:sp>
-      <p:sp>
-        <p:nvSpPr>
-          <p:cNvPr id="18" name="Text 15"/>
-          <p:cNvSpPr txBox="1"/>
-          <p:nvPr/>
-        </p:nvSpPr>
-        <p:spPr>
-          <a:xfrm>
-            <a:off x="868680" y="6473952"/>
-            <a:ext cx="10454335" cy="-210312"/>
-          </a:xfrm>
-          <a:prstGeom prst="rect">
-            <a:avLst/>
-          </a:prstGeom>
-          <a:noFill/>
-          <a:ln/>
-        </p:spPr>
-        <p:txBody>
-          <a:bodyPr wrap="square" lIns="0" tIns="0" rIns="0" bIns="0" rtlCol="0" anchor="ctr"/>
-          <a:lstStyle/>
-          <a:p>
-            <a:pPr indent="0" marL="0">
-              <a:lnSpc>
-                <a:spcPts val="1700"/>
-              </a:lnSpc>
-              <a:buNone/>
-            </a:pPr>
-            <a:endParaRPr lang="en-US" sz="1250" dirty="0"/>
-          </a:p>
-        </p:txBody>
-      </p:sp>
     </p:spTree>
   </p:cSld>
   <p:clrMapOvr>
@@ -3803,7 +3717,7 @@
         <p:spPr>
           <a:xfrm>
             <a:off x="868680" y="6108192"/>
-            <a:ext cx="10454335" cy="155448"/>
+            <a:ext cx="10454335" cy="201168"/>
           </a:xfrm>
           <a:prstGeom prst="rect">
             <a:avLst/>
@@ -9741,92 +9655,6 @@
           </a:p>
         </p:txBody>
       </p:sp>
-      <p:sp>
-        <p:nvSpPr>
-          <p:cNvPr id="18" name="Shape 15"/>
-          <p:cNvSpPr/>
-          <p:nvPr/>
-        </p:nvSpPr>
-        <p:spPr>
-          <a:xfrm>
-            <a:off x="594360" y="6172200"/>
-            <a:ext cx="11002975" cy="274320"/>
-          </a:xfrm>
-          <a:prstGeom prst="roundRect">
-            <a:avLst>
-              <a:gd name="adj" fmla="val 23333"/>
-            </a:avLst>
-          </a:prstGeom>
-          <a:solidFill>
-            <a:srgbClr val="FFFFFF"/>
-          </a:solidFill>
-          <a:ln w="19050">
-            <a:solidFill>
-              <a:srgbClr val="B07D2B"/>
-            </a:solidFill>
-            <a:prstDash val="solid"/>
-          </a:ln>
-        </p:spPr>
-      </p:sp>
-      <p:sp>
-        <p:nvSpPr>
-          <p:cNvPr id="19" name="Text 16"/>
-          <p:cNvSpPr txBox="1"/>
-          <p:nvPr/>
-        </p:nvSpPr>
-        <p:spPr>
-          <a:xfrm>
-            <a:off x="868680" y="6336792"/>
-            <a:ext cx="10454335" cy="329184"/>
-          </a:xfrm>
-          <a:prstGeom prst="rect">
-            <a:avLst/>
-          </a:prstGeom>
-          <a:noFill/>
-          <a:ln/>
-        </p:spPr>
-        <p:txBody>
-          <a:bodyPr wrap="square" lIns="0" tIns="0" rIns="0" bIns="0" rtlCol="0" anchor="ctr"/>
-          <a:lstStyle/>
-          <a:p>
-            <a:pPr indent="0" marL="0">
-              <a:buNone/>
-            </a:pPr>
-            <a:endParaRPr lang="en-US" sz="1400" dirty="0"/>
-          </a:p>
-        </p:txBody>
-      </p:sp>
-      <p:sp>
-        <p:nvSpPr>
-          <p:cNvPr id="20" name="Text 17"/>
-          <p:cNvSpPr txBox="1"/>
-          <p:nvPr/>
-        </p:nvSpPr>
-        <p:spPr>
-          <a:xfrm>
-            <a:off x="868680" y="6702552"/>
-            <a:ext cx="10454335" cy="-438912"/>
-          </a:xfrm>
-          <a:prstGeom prst="rect">
-            <a:avLst/>
-          </a:prstGeom>
-          <a:noFill/>
-          <a:ln/>
-        </p:spPr>
-        <p:txBody>
-          <a:bodyPr wrap="square" lIns="0" tIns="0" rIns="0" bIns="0" rtlCol="0" anchor="ctr"/>
-          <a:lstStyle/>
-          <a:p>
-            <a:pPr indent="0" marL="0">
-              <a:lnSpc>
-                <a:spcPts val="1700"/>
-              </a:lnSpc>
-              <a:buNone/>
-            </a:pPr>
-            <a:endParaRPr lang="en-US" sz="1250" dirty="0"/>
-          </a:p>
-        </p:txBody>
-      </p:sp>
     </p:spTree>
   </p:cSld>
   <p:clrMapOvr>
@@ -11748,92 +11576,6 @@
               <a:t>Joining with unlikely allies on a shared goal, which makes an issue look broad rather than narrow.</a:t>
             </a:r>
             <a:endParaRPr lang="en-US" sz="1200" dirty="0"/>
-          </a:p>
-        </p:txBody>
-      </p:sp>
-      <p:sp>
-        <p:nvSpPr>
-          <p:cNvPr id="18" name="Shape 15"/>
-          <p:cNvSpPr/>
-          <p:nvPr/>
-        </p:nvSpPr>
-        <p:spPr>
-          <a:xfrm>
-            <a:off x="594360" y="6263640"/>
-            <a:ext cx="11002975" cy="182880"/>
-          </a:xfrm>
-          <a:prstGeom prst="roundRect">
-            <a:avLst>
-              <a:gd name="adj" fmla="val 35000"/>
-            </a:avLst>
-          </a:prstGeom>
-          <a:solidFill>
-            <a:srgbClr val="FFFFFF"/>
-          </a:solidFill>
-          <a:ln w="19050">
-            <a:solidFill>
-              <a:srgbClr val="B07D2B"/>
-            </a:solidFill>
-            <a:prstDash val="solid"/>
-          </a:ln>
-        </p:spPr>
-      </p:sp>
-      <p:sp>
-        <p:nvSpPr>
-          <p:cNvPr id="19" name="Text 16"/>
-          <p:cNvSpPr txBox="1"/>
-          <p:nvPr/>
-        </p:nvSpPr>
-        <p:spPr>
-          <a:xfrm>
-            <a:off x="868680" y="6428232"/>
-            <a:ext cx="10454335" cy="329184"/>
-          </a:xfrm>
-          <a:prstGeom prst="rect">
-            <a:avLst/>
-          </a:prstGeom>
-          <a:noFill/>
-          <a:ln/>
-        </p:spPr>
-        <p:txBody>
-          <a:bodyPr wrap="square" lIns="0" tIns="0" rIns="0" bIns="0" rtlCol="0" anchor="ctr"/>
-          <a:lstStyle/>
-          <a:p>
-            <a:pPr indent="0" marL="0">
-              <a:buNone/>
-            </a:pPr>
-            <a:endParaRPr lang="en-US" sz="1400" dirty="0"/>
-          </a:p>
-        </p:txBody>
-      </p:sp>
-      <p:sp>
-        <p:nvSpPr>
-          <p:cNvPr id="20" name="Text 17"/>
-          <p:cNvSpPr txBox="1"/>
-          <p:nvPr/>
-        </p:nvSpPr>
-        <p:spPr>
-          <a:xfrm>
-            <a:off x="868680" y="6793992"/>
-            <a:ext cx="10454335" cy="-530352"/>
-          </a:xfrm>
-          <a:prstGeom prst="rect">
-            <a:avLst/>
-          </a:prstGeom>
-          <a:noFill/>
-          <a:ln/>
-        </p:spPr>
-        <p:txBody>
-          <a:bodyPr wrap="square" lIns="0" tIns="0" rIns="0" bIns="0" rtlCol="0" anchor="ctr"/>
-          <a:lstStyle/>
-          <a:p>
-            <a:pPr indent="0" marL="0">
-              <a:lnSpc>
-                <a:spcPts val="1700"/>
-              </a:lnSpc>
-              <a:buNone/>
-            </a:pPr>
-            <a:endParaRPr lang="en-US" sz="1250" dirty="0"/>
           </a:p>
         </p:txBody>
       </p:sp>

--- a/slides/Chapter 11 - Interest Groups and Lobbying (Lecture Deck).pptx
+++ b/slides/Chapter 11 - Interest Groups and Lobbying (Lecture Deck).pptx
@@ -619,6 +619,9 @@
 VERIFY THE THRESHOLDS BEFORE TEACHING. The Ethics Commission adjusts them for
 inflation, so the exact figures rise over time. The structure is what matters:
 registration above a threshold, fees, periodic reporting, gift caps, penalties.
+Current figures are on the Ethics Commission's lobby filing information page
+(ethics.state.tx.us, "Lobby info" for the current year) and in the annual Texas
+Register adjustment table (1 TAC §18.31).
 THE TEXAS APPROACH IS DISCLOSURE, NOT LIMITS. Texas does not cap what an interest
 group may spend on lobbying. It requires that the activity be reported and
 published. Compare that to Chapter 9, where Texas also declines to cap campaign
@@ -2959,7 +2962,7 @@
                 <a:ea typeface="Calibri" pitchFamily="34" charset="-122"/>
                 <a:cs typeface="Calibri" pitchFamily="34" charset="-120"/>
               </a:rPr>
-              <a:t>Registered lobbyists file reports listing clients and expenditures, monthly unless spending is low enough for annual filing.</a:t>
+              <a:t>Registered lobbyists file reports listing clients and expenditures: monthly, or annually if they expect to spend no more than an inflation-adjusted ceiling (about $2,290 in 2026).</a:t>
             </a:r>
             <a:endParaRPr lang="en-US" sz="1200" dirty="0"/>
           </a:p>
@@ -3043,7 +3046,7 @@
                 <a:ea typeface="Calibri" pitchFamily="34" charset="-122"/>
                 <a:cs typeface="Calibri" pitchFamily="34" charset="-120"/>
               </a:rPr>
-              <a:t>Gifts to any one official are capped at $500 per year, and reportable gifts above roughly $110 must be disclosed.</a:t>
+              <a:t>Gifts to any one official are capped at $500 per year, and individual gifts above an inflation-adjusted threshold ($110 for 2026, rising to $120) must be itemized; food, drink, and entertainment are itemized above 60 percent of the legislative per diem.</a:t>
             </a:r>
             <a:endParaRPr lang="en-US" sz="1200" dirty="0"/>
           </a:p>
@@ -3127,7 +3130,7 @@
                 <a:ea typeface="Calibri" pitchFamily="34" charset="-122"/>
                 <a:cs typeface="Calibri" pitchFamily="34" charset="-120"/>
               </a:rPr>
-              <a:t>Fines up to $10,000, and criminal penalties as severe as a second-degree felony for serious violations.</a:t>
+              <a:t>Civil penalties from the Ethics Commission of up to $5,000 or three times the amount at issue; criminal penalties range from a Class A misdemeanor (most knowing violations) to a third-degree felony (contingent-fee lobbying) and, for bribery, a second-degree felony with a fine of up to $10,000.</a:t>
             </a:r>
             <a:endParaRPr lang="en-US" sz="1200" dirty="0"/>
           </a:p>
